--- a/formation-ia/01-slides/formation-ia-2-jours.pptx
+++ b/formation-ia/01-slides/formation-ia-2-jours.pptx
@@ -2254,7 +2254,7 @@
           <a:lstStyle/>
           <a:p>
             <a:r>
-              <a:t>Si le groupe est homogène (une seule entreprise), remplacez les trois cas par trois services différents de leur propre organisation. C'est encore plus efficace.</a:t>
+              <a:t>Si le groupe vient d'une seule entreprise, remplacez Sophie, Marc et Nadia par trois collègues réels de leur maison. C'est encore plus efficace. Personne n'a besoin de connaître l'informatique pour faire cet atelier : ils conseillent quelqu'un, c'est tout.</a:t>
             </a:r>
           </a:p>
         </p:txBody>
@@ -22085,7 +22085,7 @@
                 </a:solidFill>
                 <a:latin typeface="Calibri"/>
               </a:rPr>
-              <a:t>Les plus polyvalents, le meilleur écosystème. Le choix par défaut pour le travail quotidien. Hébergement hors UE sauf offre entreprise.</a:t>
+              <a:t>Les plus polyvalents, le plus d'outils autour. Le choix par défaut au quotidien. Hébergement hors UE sauf offre entreprise.</a:t>
             </a:r>
           </a:p>
         </p:txBody>
@@ -22253,7 +22253,7 @@
                 </a:solidFill>
                 <a:latin typeface="Calibri"/>
               </a:rPr>
-              <a:t>Hébergement en Europe, excellent français, engagement contractuel sur la résidence des données. La réponse quand la question 1 bloque.</a:t>
+              <a:t>Hébergement en Europe, excellent français, engagement écrit sur le pays où sont stockées les données. La réponse quand la question 1 bloque.</a:t>
             </a:r>
           </a:p>
         </p:txBody>
@@ -22547,7 +22547,7 @@
                 </a:solidFill>
                 <a:latin typeface="Consolas"/>
               </a:rPr>
-              <a:t>TRANSCRIPTION · OCR · TRADUCTION · IMAGE · VOIX</a:t>
+              <a:t>TRANSCRIPTION · DOCUMENTS SCANNÉS · TRADUCTION · IMAGE · VOIX</a:t>
             </a:r>
           </a:p>
         </p:txBody>
@@ -22817,7 +22817,7 @@
                 </a:solidFill>
                 <a:latin typeface="Trebuchet MS"/>
               </a:rPr>
-              <a:t>Vous êtes responsable informatique — que choisissez-vous ?</a:t>
+              <a:t>Trois collègues vous demandent conseil</a:t>
             </a:r>
           </a:p>
         </p:txBody>
@@ -22943,7 +22943,7 @@
                 </a:solidFill>
                 <a:latin typeface="Calibri"/>
               </a:rPr>
-              <a:t>Par groupes de trois. Chaque groupe reçoit un cas :</a:t>
+              <a:t>Par groupes de trois. Chaque groupe reçoit une personne :</a:t>
             </a:r>
           </a:p>
         </p:txBody>
@@ -23027,7 +23027,7 @@
                 </a:solidFill>
                 <a:latin typeface="Calibri"/>
               </a:rPr>
-              <a:t>Groupe 1</a:t>
+              <a:t>Sophie</a:t>
             </a:r>
             <a:r>
               <a:rPr sz="1700" b="0" i="0">
@@ -23036,7 +23036,7 @@
                 </a:solidFill>
                 <a:latin typeface="Calibri"/>
               </a:rPr>
-              <a:t> — une PME industrielle de 50 personnes, données clients classiques.</a:t>
+              <a:t>, assistante RH : elle doit trier 80 candidatures et rédiger les réponses.</a:t>
             </a:r>
           </a:p>
         </p:txBody>
@@ -23120,7 +23120,7 @@
                 </a:solidFill>
                 <a:latin typeface="Calibri"/>
               </a:rPr>
-              <a:t>Groupe 2</a:t>
+              <a:t>Marc</a:t>
             </a:r>
             <a:r>
               <a:rPr sz="1700" b="0" i="0">
@@ -23129,7 +23129,7 @@
                 </a:solidFill>
                 <a:latin typeface="Calibri"/>
               </a:rPr>
-              <a:t> — un cabinet d'avocats, dossiers couverts par le secret professionnel.</a:t>
+              <a:t>, artisan à son compte : il veut refaire ses devis et le texte de son site.</a:t>
             </a:r>
           </a:p>
         </p:txBody>
@@ -23213,7 +23213,7 @@
                 </a:solidFill>
                 <a:latin typeface="Calibri"/>
               </a:rPr>
-              <a:t>Groupe 3</a:t>
+              <a:t>Nadia</a:t>
             </a:r>
             <a:r>
               <a:rPr sz="1700" b="0" i="0">
@@ -23222,7 +23222,7 @@
                 </a:solidFill>
                 <a:latin typeface="Calibri"/>
               </a:rPr>
-              <a:t> — une agence créative, beaucoup d'images, budget serré.</a:t>
+              <a:t>, agent en mairie : elle doit résumer les comptes rendus du conseil municipal.</a:t>
             </a:r>
           </a:p>
         </p:txBody>
@@ -23306,7 +23306,7 @@
                 </a:solidFill>
                 <a:latin typeface="Calibri"/>
               </a:rPr>
-              <a:t>Répondez aux quatre questions dans l'ordre, puis choisissez une famille. </a:t>
+              <a:t>Posez-vous les quatre questions </a:t>
             </a:r>
             <a:r>
               <a:rPr sz="1700" b="1" i="0">
@@ -23315,7 +23315,25 @@
                 </a:solidFill>
                 <a:latin typeface="Calibri"/>
               </a:rPr>
-              <a:t>Trois minutes de restitution par groupe.</a:t>
+              <a:t>à sa place</a:t>
+            </a:r>
+            <a:r>
+              <a:rPr sz="1700" b="0" i="0">
+                <a:solidFill>
+                  <a:srgbClr val="12181D"/>
+                </a:solidFill>
+                <a:latin typeface="Calibri"/>
+              </a:rPr>
+              <a:t>, puis dites-lui quelle famille d'outils lui convient. </a:t>
+            </a:r>
+            <a:r>
+              <a:rPr sz="1700" b="1" i="0">
+                <a:solidFill>
+                  <a:srgbClr val="12181D"/>
+                </a:solidFill>
+                <a:latin typeface="Calibri"/>
+              </a:rPr>
+              <a:t>Trois minutes pour raconter.</a:t>
             </a:r>
           </a:p>
         </p:txBody>
@@ -23483,7 +23501,7 @@
                 </a:solidFill>
                 <a:latin typeface="Calibri"/>
               </a:rPr>
-              <a:t>Les trois groupes n'aboutiront pas au même choix, et c'est exactement le résultat attendu. Faites-leur dire </a:t>
+              <a:t>Les trois groupes ne donneront pas le même conseil, et c'est le résultat attendu. Faites dire </a:t>
             </a:r>
             <a:r>
               <a:rPr sz="1600" b="1" i="0">
@@ -23492,7 +23510,7 @@
                 </a:solidFill>
                 <a:latin typeface="Calibri"/>
               </a:rPr>
-              <a:t>quelle question a été décisive</a:t>
+              <a:t>quelle question a tranché</a:t>
             </a:r>
             <a:r>
               <a:rPr sz="1600" b="0" i="0">
@@ -23501,7 +23519,7 @@
                 </a:solidFill>
                 <a:latin typeface="Calibri"/>
               </a:rPr>
-              <a:t> dans chaque cas.</a:t>
+              <a:t> : pour Sophie ce sont les données personnelles, pour Marc le prix, pour Nadia le lieu d'hébergement.</a:t>
             </a:r>
           </a:p>
         </p:txBody>
@@ -25368,7 +25386,7 @@
                 </a:solidFill>
                 <a:latin typeface="Calibri"/>
               </a:rPr>
-              <a:t> impose aux organisations qui déploient des systèmes d'IA de veiller au niveau de littératie de leurs collaborateurs — salariés, mais aussi prestataires agissant pour leur compte.</a:t>
+              <a:t> impose aux organisations qui déploient des systèmes d'IA de veiller à ce que leurs équipes sachent s'en servir. Cela vaut pour les salariés, mais aussi pour les prestataires qui travaillent pour eux.</a:t>
             </a:r>
           </a:p>
         </p:txBody>
@@ -25452,7 +25470,7 @@
                 </a:solidFill>
                 <a:latin typeface="Calibri"/>
               </a:rPr>
-              <a:t>C'est une obligation de moyens, proportionnée au rôle de chacun. </a:t>
+              <a:t>La loi demande de faire des efforts, pas d'atteindre un résultat mesurable. </a:t>
             </a:r>
             <a:r>
               <a:rPr sz="1600" b="1" i="0">
